--- a/decks/geog-rivers/geog-rivers_ch6_managing-floods.pptx
+++ b/decks/geog-rivers/geog-rivers_ch6_managing-floods.pptx
@@ -125,29 +125,29 @@
   <p:extLst>
     <p:ext uri="{521415D9-36F7-43E2-AB2F-B90AF26B5E84}">
       <p14:sectionLst xmlns:p14="http://schemas.microsoft.com/office/powerpoint/2010/main">
-        <p14:section name="Opening" id="{faba87a5-00c4-2717-9fac-9a335d86c0da}">
+        <p14:section name="Opening" id="{f539a4a4-b9b0-7beb-61d3-76488162d735}">
           <p14:sldIdLst>
             <p14:sldId id="256"/>
           </p14:sldIdLst>
         </p14:section>
-        <p14:section name="Gate" id="{637689ce-c42e-afb0-30f7-51affdcbd161}">
+        <p14:section name="Gate" id="{fce265cf-8498-4c0a-cf45-389a1935d256}">
           <p14:sldIdLst>
             <p14:sldId id="257"/>
             <p14:sldId id="258"/>
           </p14:sldIdLst>
         </p14:section>
-        <p14:section name="Pre-teach" id="{a7b2f4d6-d858-43a9-c956-35ffc588d961}">
+        <p14:section name="Pre-teach" id="{a68ace01-c8dd-4b99-6051-d4174cd2daeb}">
           <p14:sldIdLst>
             <p14:sldId id="259"/>
           </p14:sldIdLst>
         </p14:section>
-        <p14:section name="Read-along" id="{5abe7e0a-c4e0-8b22-5f10-f0d4fb8a611b}">
+        <p14:section name="Read-along" id="{824e1700-4e8d-93bf-da3e-149c8e731628}">
           <p14:sldIdLst>
             <p14:sldId id="260"/>
             <p14:sldId id="261"/>
           </p14:sldIdLst>
         </p14:section>
-        <p14:section name="Teach" id="{1a6fcad4-eb80-ded9-9eed-6c13c280ca79}">
+        <p14:section name="Teach" id="{7587484f-a6e2-1da3-3335-dbe519bb7c71}">
           <p14:sldIdLst>
             <p14:sldId id="262"/>
             <p14:sldId id="263"/>
@@ -156,7 +156,7 @@
             <p14:sldId id="266"/>
           </p14:sldIdLst>
         </p14:section>
-        <p14:section name="Routes" id="{df218818-7ce3-a4ee-809e-3a8c34b74c46}">
+        <p14:section name="Routes" id="{858ef0c8-531c-b015-a540-344c0984a537}">
           <p14:sldIdLst>
             <p14:sldId id="267"/>
             <p14:sldId id="268"/>
@@ -164,12 +164,12 @@
             <p14:sldId id="270"/>
           </p14:sldIdLst>
         </p14:section>
-        <p14:section name="Close" id="{b9f60a4a-5e54-8bb4-61d8-7828d14ee900}">
+        <p14:section name="Close" id="{e7c6b98c-c012-20fe-cf05-a80dabc760fd}">
           <p14:sldIdLst>
             <p14:sldId id="271"/>
           </p14:sldIdLst>
         </p14:section>
-        <p14:section name="Answers" id="{5b84571f-6a5d-8f62-3653-75ecac0847ce}">
+        <p14:section name="Answers" id="{f646befe-a76e-e9a2-2d6b-f801aa636da7}">
           <p14:sldIdLst>
             <p14:sldId id="272"/>
             <p14:sldId id="273"/>
@@ -1233,7 +1233,7 @@
               <a:rPr lang="en-US" dirty="0"/>
               <a:t>Exit ticket — individual, silent, on a slip or mini-whiteboard. Recall before help: no notes, no lanes, no hints. Collect before pupils leave.
 Question: Which of these is a SHORT-term way of coping with a flood?
-Answer: D   Putting sandbags across doorways. Sandbags are put down just before or during a flood; the others take years to build or grow.
+Answer: A   Putting sandbags across doorways. Sandbags are put down just before or during a flood; the others take years to build or grow.
 Source of this question: gate item 1 re-asked (options rotated) — this chapter has no third quick-check module.
 The ebook also holds task 3, "You are in charge", for homework or the next lesson's do now.
 Sort the slips: correct → ready to move on; incorrect → start next lesson in the pre-teach group, with the read-along and the Support lane. Same destination next time.</a:t>
@@ -1325,7 +1325,7 @@
             <a:r>
               <a:rPr lang="en-US" dirty="0"/>
               <a:t>Answers — task 1: Built to last. Reveal the answer; pupils mark their own work in a different colour, then read the "why" together. Same destination for every lane, so one answer serves the whole class.
-Answer: A   Building an embankment along the river
+Answer: B   Building an embankment along the river
 Why: Long-term defences are built or grown to last for years (embankments, walls, dams, barriers, trees). Short-term methods are used just before or during a flood (warnings, sandbags, evacuation, moving valuables).
 Ask a Support pupil to explain one step, and a Stretch pupil to share their extension.</a:t>
             </a:r>
@@ -1507,7 +1507,7 @@
             <a:r>
               <a:rPr lang="en-US" dirty="0"/>
               <a:t>Answers — exit ticket: Exit ticket. Reveal the answer; pupils mark their own work in a different colour, then read the "why" together. Same destination for every lane, so one answer serves the whole class.
-Answer: D   Putting sandbags across doorways
+Answer: A   Putting sandbags across doorways
 Why: Sandbags are put down just before or during a flood; the others take years to build or grow.
 Ask a Support pupil to explain one step, and a Stretch pupil to share their extension.</a:t>
             </a:r>
@@ -1598,7 +1598,7 @@
             <a:r>
               <a:rPr lang="en-US" dirty="0"/>
               <a:t>Do now — retrieval. Silent, no notes, no help: recall comes before any support. Give about four minutes.
-1. Which of these is a SHORT-term way of coping with a flood?  →  A   Putting sandbags across doorways
+1. Which of these is a SHORT-term way of coping with a flood?  →  B   Putting sandbags across doorways
 2. The Thames Barrier's gates can take between 15 and 90 minutes to close. What is the difference, in minutes, between the slowest and the quickest closing time?  →  75 minutes
 3. The Thames Barrier has ___ gates.  →  ten
 Circulate: who gets 3/3 (Stretch route), 2/3 (Core), 0–1 (Support)? Use this to route pupils later in the lesson.</a:t>
@@ -1690,7 +1690,7 @@
             <a:r>
               <a:rPr lang="en-US" dirty="0"/>
               <a:t>Answers — pupils mark their own in a different colour, then hands up for 3/3, 2/3, 1/3.
-1. A   Putting sandbags across doorways. Sandbags are put down just before or during a flood; the others take years to build or grow.
+1. B   Putting sandbags across doorways. Sandbags are put down just before or during a flood; the others take years to build or grow.
 2. 75 minutes. 90 − 15 = 75 minutes.
 3. ten. The barrier has ten steel gates stretching about 500 m across the river.
 Say the route each score points to: 3/3 Stretch, 2/3 Core, 0–1 Support. Pupils may choose to move up.</a:t>
@@ -5572,7 +5572,7 @@
                 <a:ea typeface="Calibri" pitchFamily="34" charset="-122"/>
                 <a:cs typeface="Calibri" pitchFamily="34" charset="-120"/>
               </a:rPr>
-              <a:t>Building an embankment along the river</a:t>
+              <a:t>Sending out a flood warning</a:t>
             </a:r>
             <a:endParaRPr lang="en-US" sz="2600" dirty="0"/>
           </a:p>
@@ -5609,7 +5609,7 @@
                 <a:ea typeface="Calibri" pitchFamily="34" charset="-122"/>
                 <a:cs typeface="Calibri" pitchFamily="34" charset="-120"/>
               </a:rPr>
-              <a:t>Putting sandbags in front of doors</a:t>
+              <a:t>Building an embankment along the river</a:t>
             </a:r>
             <a:endParaRPr lang="en-US" sz="2600" dirty="0"/>
           </a:p>
@@ -5646,7 +5646,7 @@
                 <a:ea typeface="Calibri" pitchFamily="34" charset="-122"/>
                 <a:cs typeface="Calibri" pitchFamily="34" charset="-120"/>
               </a:rPr>
-              <a:t>Sending out a flood warning</a:t>
+              <a:t>Moving furniture upstairs</a:t>
             </a:r>
             <a:endParaRPr lang="en-US" sz="2600" dirty="0"/>
           </a:p>
@@ -5683,7 +5683,7 @@
                 <a:ea typeface="Calibri" pitchFamily="34" charset="-122"/>
                 <a:cs typeface="Calibri" pitchFamily="34" charset="-120"/>
               </a:rPr>
-              <a:t>Moving furniture upstairs</a:t>
+              <a:t>Putting sandbags in front of doors</a:t>
             </a:r>
             <a:endParaRPr lang="en-US" sz="2600" dirty="0"/>
           </a:p>
@@ -8481,7 +8481,7 @@
                 <a:ea typeface="Calibri" pitchFamily="34" charset="-122"/>
                 <a:cs typeface="Calibri" pitchFamily="34" charset="-120"/>
               </a:rPr>
-              <a:t>Building a flood wall along the river</a:t>
+              <a:t>Putting sandbags across doorways</a:t>
             </a:r>
             <a:endParaRPr lang="en-US" sz="2400" dirty="0"/>
           </a:p>
@@ -8592,7 +8592,7 @@
                 <a:ea typeface="Calibri" pitchFamily="34" charset="-122"/>
                 <a:cs typeface="Calibri" pitchFamily="34" charset="-120"/>
               </a:rPr>
-              <a:t>Putting sandbags across doorways</a:t>
+              <a:t>Building a flood wall along the river</a:t>
             </a:r>
             <a:endParaRPr lang="en-US" sz="2400" dirty="0"/>
           </a:p>
@@ -8997,7 +8997,7 @@
                 <a:ea typeface="Cambria" pitchFamily="34" charset="-122"/>
                 <a:cs typeface="Cambria" pitchFamily="34" charset="-120"/>
               </a:rPr>
-              <a:t>A   Building an embankment along the river</a:t>
+              <a:t>B   Building an embankment along the river</a:t>
             </a:r>
             <a:endParaRPr lang="en-US" sz="1800" dirty="0"/>
           </a:p>
@@ -9915,7 +9915,7 @@
                 <a:ea typeface="Cambria" pitchFamily="34" charset="-122"/>
                 <a:cs typeface="Cambria" pitchFamily="34" charset="-120"/>
               </a:rPr>
-              <a:t>D   Putting sandbags across doorways</a:t>
+              <a:t>A   Putting sandbags across doorways</a:t>
             </a:r>
             <a:endParaRPr lang="en-US" sz="1800" dirty="0"/>
           </a:p>
@@ -10449,7 +10449,7 @@
                 <a:ea typeface="Calibri" pitchFamily="34" charset="-122"/>
                 <a:cs typeface="Calibri" pitchFamily="34" charset="-120"/>
               </a:rPr>
-              <a:t>Putting sandbags across doorways</a:t>
+              <a:t>Building a flood wall along the river</a:t>
             </a:r>
             <a:endParaRPr lang="en-US" sz="1800" dirty="0"/>
           </a:p>
@@ -10486,7 +10486,7 @@
                 <a:ea typeface="Calibri" pitchFamily="34" charset="-122"/>
                 <a:cs typeface="Calibri" pitchFamily="34" charset="-120"/>
               </a:rPr>
-              <a:t>Building a flood wall along the river</a:t>
+              <a:t>Putting sandbags across doorways</a:t>
             </a:r>
             <a:endParaRPr lang="en-US" sz="1800" dirty="0"/>
           </a:p>
@@ -11357,7 +11357,7 @@
                 <a:ea typeface="Calibri" pitchFamily="34" charset="-122"/>
                 <a:cs typeface="Calibri" pitchFamily="34" charset="-120"/>
               </a:rPr>
-              <a:t>A   Putting sandbags across doorways</a:t>
+              <a:t>B   Putting sandbags across doorways</a:t>
             </a:r>
             <a:endParaRPr lang="en-US" sz="2200" dirty="0"/>
           </a:p>

--- a/decks/geog-rivers/geog-rivers_ch6_managing-floods.pptx
+++ b/decks/geog-rivers/geog-rivers_ch6_managing-floods.pptx
@@ -125,29 +125,29 @@
   <p:extLst>
     <p:ext uri="{521415D9-36F7-43E2-AB2F-B90AF26B5E84}">
       <p14:sectionLst xmlns:p14="http://schemas.microsoft.com/office/powerpoint/2010/main">
-        <p14:section name="Opening" id="{f539a4a4-b9b0-7beb-61d3-76488162d735}">
+        <p14:section name="Opening" id="{32033ae0-5c71-b002-560d-0384a627cc47}">
           <p14:sldIdLst>
             <p14:sldId id="256"/>
           </p14:sldIdLst>
         </p14:section>
-        <p14:section name="Gate" id="{fce265cf-8498-4c0a-cf45-389a1935d256}">
+        <p14:section name="Gate" id="{6835fbba-0657-c110-e247-714226384706}">
           <p14:sldIdLst>
             <p14:sldId id="257"/>
             <p14:sldId id="258"/>
           </p14:sldIdLst>
         </p14:section>
-        <p14:section name="Pre-teach" id="{a68ace01-c8dd-4b99-6051-d4174cd2daeb}">
+        <p14:section name="Pre-teach" id="{2de80d2a-da32-29cd-7602-625301c236c1}">
           <p14:sldIdLst>
             <p14:sldId id="259"/>
           </p14:sldIdLst>
         </p14:section>
-        <p14:section name="Read-along" id="{824e1700-4e8d-93bf-da3e-149c8e731628}">
+        <p14:section name="Read-along" id="{528a1920-7455-d6f8-7e02-fec6b2973178}">
           <p14:sldIdLst>
             <p14:sldId id="260"/>
             <p14:sldId id="261"/>
           </p14:sldIdLst>
         </p14:section>
-        <p14:section name="Teach" id="{7587484f-a6e2-1da3-3335-dbe519bb7c71}">
+        <p14:section name="Teach" id="{7ea1873e-5ab6-1af6-2645-401cabc54811}">
           <p14:sldIdLst>
             <p14:sldId id="262"/>
             <p14:sldId id="263"/>
@@ -156,7 +156,7 @@
             <p14:sldId id="266"/>
           </p14:sldIdLst>
         </p14:section>
-        <p14:section name="Routes" id="{858ef0c8-531c-b015-a540-344c0984a537}">
+        <p14:section name="Routes" id="{5b819ff1-722d-a1ed-52d5-0aaccb1e0de1}">
           <p14:sldIdLst>
             <p14:sldId id="267"/>
             <p14:sldId id="268"/>
@@ -164,12 +164,12 @@
             <p14:sldId id="270"/>
           </p14:sldIdLst>
         </p14:section>
-        <p14:section name="Close" id="{e7c6b98c-c012-20fe-cf05-a80dabc760fd}">
+        <p14:section name="Close" id="{b8000e17-69a7-6a0b-47fc-50f24c240b14}">
           <p14:sldIdLst>
             <p14:sldId id="271"/>
           </p14:sldIdLst>
         </p14:section>
-        <p14:section name="Answers" id="{f646befe-a76e-e9a2-2d6b-f801aa636da7}">
+        <p14:section name="Answers" id="{70749f0d-2f0a-a55a-1894-ce3d1d272f60}">
           <p14:sldIdLst>
             <p14:sldId id="272"/>
             <p14:sldId id="273"/>
